--- a/ppt/PPT-02-Custom-Door-Smart-Manufacturing-Plan.pptx
+++ b/ppt/PPT-02-Custom-Door-Smart-Manufacturing-Plan.pptx
@@ -4930,41 +4930,50 @@
           </a:p>
         </p:txBody>
       </p:sp>
-      <p:cxnSp>
-        <p:nvCxnSpPr>
-          <p:cNvPr id="7" name="Connector 6"/>
-          <p:cNvCxnSpPr/>
-          <p:nvPr/>
-        </p:nvCxnSpPr>
-        <p:spPr>
-          <a:xfrm>
-            <a:off x="566928" y="3438144"/>
-            <a:ext cx="5120640" cy="0"/>
-          </a:xfrm>
-          <a:prstGeom prst="line">
-            <a:avLst/>
-          </a:prstGeom>
-          <a:ln w="25400">
-            <a:solidFill>
-              <a:srgbClr val="2F6BE4"/>
-            </a:solidFill>
+      <p:sp>
+        <p:nvSpPr>
+          <p:cNvPr id="7" name="Rectangle 6"/>
+          <p:cNvSpPr/>
+          <p:nvPr/>
+        </p:nvSpPr>
+        <p:spPr>
+          <a:xfrm>
+            <a:off x="566928" y="3425444"/>
+            <a:ext cx="5120640" cy="25400"/>
+          </a:xfrm>
+          <a:prstGeom prst="rect">
+            <a:avLst/>
+          </a:prstGeom>
+          <a:solidFill>
+            <a:srgbClr val="2F6BE4"/>
+          </a:solidFill>
+          <a:ln>
+            <a:noFill/>
           </a:ln>
+          <a:effectLst/>
         </p:spPr>
         <p:style>
-          <a:lnRef idx="2">
+          <a:lnRef idx="1">
             <a:schemeClr val="accent1"/>
           </a:lnRef>
-          <a:fillRef idx="0">
+          <a:fillRef idx="3">
             <a:schemeClr val="accent1"/>
           </a:fillRef>
-          <a:effectRef idx="1">
+          <a:effectRef idx="2">
             <a:schemeClr val="accent1"/>
           </a:effectRef>
           <a:fontRef idx="minor">
-            <a:schemeClr val="tx1"/>
+            <a:schemeClr val="lt1"/>
           </a:fontRef>
         </p:style>
-      </p:cxnSp>
+        <p:txBody>
+          <a:bodyPr rtlCol="0" anchor="ctr"/>
+          <a:lstStyle/>
+          <a:p>
+            <a:pPr algn="ctr"/>
+          </a:p>
+        </p:txBody>
+      </p:sp>
       <p:sp>
         <p:nvSpPr>
           <p:cNvPr id="8" name="TextBox 7"/>
@@ -5745,41 +5754,50 @@
           </a:p>
         </p:txBody>
       </p:sp>
-      <p:cxnSp>
-        <p:nvCxnSpPr>
-          <p:cNvPr id="6" name="Connector 5"/>
-          <p:cNvCxnSpPr/>
-          <p:nvPr/>
-        </p:nvCxnSpPr>
-        <p:spPr>
-          <a:xfrm>
-            <a:off x="566928" y="1591056"/>
-            <a:ext cx="11058113" cy="0"/>
-          </a:xfrm>
-          <a:prstGeom prst="line">
-            <a:avLst/>
-          </a:prstGeom>
-          <a:ln w="12700">
-            <a:solidFill>
-              <a:srgbClr val="D9E0EA"/>
-            </a:solidFill>
+      <p:sp>
+        <p:nvSpPr>
+          <p:cNvPr id="6" name="Rectangle 5"/>
+          <p:cNvSpPr/>
+          <p:nvPr/>
+        </p:nvSpPr>
+        <p:spPr>
+          <a:xfrm>
+            <a:off x="566928" y="1584706"/>
+            <a:ext cx="11058113" cy="12700"/>
+          </a:xfrm>
+          <a:prstGeom prst="rect">
+            <a:avLst/>
+          </a:prstGeom>
+          <a:solidFill>
+            <a:srgbClr val="D9E0EA"/>
+          </a:solidFill>
+          <a:ln>
+            <a:noFill/>
           </a:ln>
+          <a:effectLst/>
         </p:spPr>
         <p:style>
-          <a:lnRef idx="2">
+          <a:lnRef idx="1">
             <a:schemeClr val="accent1"/>
           </a:lnRef>
-          <a:fillRef idx="0">
+          <a:fillRef idx="3">
             <a:schemeClr val="accent1"/>
           </a:fillRef>
-          <a:effectRef idx="1">
+          <a:effectRef idx="2">
             <a:schemeClr val="accent1"/>
           </a:effectRef>
           <a:fontRef idx="minor">
-            <a:schemeClr val="tx1"/>
+            <a:schemeClr val="lt1"/>
           </a:fontRef>
         </p:style>
-      </p:cxnSp>
+        <p:txBody>
+          <a:bodyPr rtlCol="0" anchor="ctr"/>
+          <a:lstStyle/>
+          <a:p>
+            <a:pPr algn="ctr"/>
+          </a:p>
+        </p:txBody>
+      </p:sp>
       <p:sp>
         <p:nvSpPr>
           <p:cNvPr id="7" name="TextBox 6"/>
@@ -10209,41 +10227,50 @@
           </a:p>
         </p:txBody>
       </p:sp>
-      <p:cxnSp>
-        <p:nvCxnSpPr>
-          <p:cNvPr id="6" name="Connector 5"/>
-          <p:cNvCxnSpPr/>
-          <p:nvPr/>
-        </p:nvCxnSpPr>
-        <p:spPr>
-          <a:xfrm>
-            <a:off x="566928" y="1591056"/>
-            <a:ext cx="11058113" cy="0"/>
-          </a:xfrm>
-          <a:prstGeom prst="line">
-            <a:avLst/>
-          </a:prstGeom>
-          <a:ln w="12700">
-            <a:solidFill>
-              <a:srgbClr val="D9E0EA"/>
-            </a:solidFill>
+      <p:sp>
+        <p:nvSpPr>
+          <p:cNvPr id="6" name="Rectangle 5"/>
+          <p:cNvSpPr/>
+          <p:nvPr/>
+        </p:nvSpPr>
+        <p:spPr>
+          <a:xfrm>
+            <a:off x="566928" y="1584706"/>
+            <a:ext cx="11058113" cy="12700"/>
+          </a:xfrm>
+          <a:prstGeom prst="rect">
+            <a:avLst/>
+          </a:prstGeom>
+          <a:solidFill>
+            <a:srgbClr val="D9E0EA"/>
+          </a:solidFill>
+          <a:ln>
+            <a:noFill/>
           </a:ln>
+          <a:effectLst/>
         </p:spPr>
         <p:style>
-          <a:lnRef idx="2">
+          <a:lnRef idx="1">
             <a:schemeClr val="accent1"/>
           </a:lnRef>
-          <a:fillRef idx="0">
+          <a:fillRef idx="3">
             <a:schemeClr val="accent1"/>
           </a:fillRef>
-          <a:effectRef idx="1">
+          <a:effectRef idx="2">
             <a:schemeClr val="accent1"/>
           </a:effectRef>
           <a:fontRef idx="minor">
-            <a:schemeClr val="tx1"/>
+            <a:schemeClr val="lt1"/>
           </a:fontRef>
         </p:style>
-      </p:cxnSp>
+        <p:txBody>
+          <a:bodyPr rtlCol="0" anchor="ctr"/>
+          <a:lstStyle/>
+          <a:p>
+            <a:pPr algn="ctr"/>
+          </a:p>
+        </p:txBody>
+      </p:sp>
       <p:sp>
         <p:nvSpPr>
           <p:cNvPr id="7" name="TextBox 6"/>
@@ -11644,41 +11671,50 @@
           </a:p>
         </p:txBody>
       </p:sp>
-      <p:cxnSp>
-        <p:nvCxnSpPr>
-          <p:cNvPr id="6" name="Connector 5"/>
-          <p:cNvCxnSpPr/>
-          <p:nvPr/>
-        </p:nvCxnSpPr>
-        <p:spPr>
-          <a:xfrm>
-            <a:off x="566928" y="1591056"/>
-            <a:ext cx="11058113" cy="0"/>
-          </a:xfrm>
-          <a:prstGeom prst="line">
-            <a:avLst/>
-          </a:prstGeom>
-          <a:ln w="12700">
-            <a:solidFill>
-              <a:srgbClr val="D9E0EA"/>
-            </a:solidFill>
+      <p:sp>
+        <p:nvSpPr>
+          <p:cNvPr id="6" name="Rectangle 5"/>
+          <p:cNvSpPr/>
+          <p:nvPr/>
+        </p:nvSpPr>
+        <p:spPr>
+          <a:xfrm>
+            <a:off x="566928" y="1584706"/>
+            <a:ext cx="11058113" cy="12700"/>
+          </a:xfrm>
+          <a:prstGeom prst="rect">
+            <a:avLst/>
+          </a:prstGeom>
+          <a:solidFill>
+            <a:srgbClr val="D9E0EA"/>
+          </a:solidFill>
+          <a:ln>
+            <a:noFill/>
           </a:ln>
+          <a:effectLst/>
         </p:spPr>
         <p:style>
-          <a:lnRef idx="2">
+          <a:lnRef idx="1">
             <a:schemeClr val="accent1"/>
           </a:lnRef>
-          <a:fillRef idx="0">
+          <a:fillRef idx="3">
             <a:schemeClr val="accent1"/>
           </a:fillRef>
-          <a:effectRef idx="1">
+          <a:effectRef idx="2">
             <a:schemeClr val="accent1"/>
           </a:effectRef>
           <a:fontRef idx="minor">
-            <a:schemeClr val="tx1"/>
+            <a:schemeClr val="lt1"/>
           </a:fontRef>
         </p:style>
-      </p:cxnSp>
+        <p:txBody>
+          <a:bodyPr rtlCol="0" anchor="ctr"/>
+          <a:lstStyle/>
+          <a:p>
+            <a:pPr algn="ctr"/>
+          </a:p>
+        </p:txBody>
+      </p:sp>
       <p:sp>
         <p:nvSpPr>
           <p:cNvPr id="7" name="TextBox 6"/>
@@ -13079,41 +13115,50 @@
           </a:p>
         </p:txBody>
       </p:sp>
-      <p:cxnSp>
-        <p:nvCxnSpPr>
-          <p:cNvPr id="6" name="Connector 5"/>
-          <p:cNvCxnSpPr/>
-          <p:nvPr/>
-        </p:nvCxnSpPr>
-        <p:spPr>
-          <a:xfrm>
-            <a:off x="566928" y="1591056"/>
-            <a:ext cx="11058113" cy="0"/>
-          </a:xfrm>
-          <a:prstGeom prst="line">
-            <a:avLst/>
-          </a:prstGeom>
-          <a:ln w="12700">
-            <a:solidFill>
-              <a:srgbClr val="D9E0EA"/>
-            </a:solidFill>
+      <p:sp>
+        <p:nvSpPr>
+          <p:cNvPr id="6" name="Rectangle 5"/>
+          <p:cNvSpPr/>
+          <p:nvPr/>
+        </p:nvSpPr>
+        <p:spPr>
+          <a:xfrm>
+            <a:off x="566928" y="1584706"/>
+            <a:ext cx="11058113" cy="12700"/>
+          </a:xfrm>
+          <a:prstGeom prst="rect">
+            <a:avLst/>
+          </a:prstGeom>
+          <a:solidFill>
+            <a:srgbClr val="D9E0EA"/>
+          </a:solidFill>
+          <a:ln>
+            <a:noFill/>
           </a:ln>
+          <a:effectLst/>
         </p:spPr>
         <p:style>
-          <a:lnRef idx="2">
+          <a:lnRef idx="1">
             <a:schemeClr val="accent1"/>
           </a:lnRef>
-          <a:fillRef idx="0">
+          <a:fillRef idx="3">
             <a:schemeClr val="accent1"/>
           </a:fillRef>
-          <a:effectRef idx="1">
+          <a:effectRef idx="2">
             <a:schemeClr val="accent1"/>
           </a:effectRef>
           <a:fontRef idx="minor">
-            <a:schemeClr val="tx1"/>
+            <a:schemeClr val="lt1"/>
           </a:fontRef>
         </p:style>
-      </p:cxnSp>
+        <p:txBody>
+          <a:bodyPr rtlCol="0" anchor="ctr"/>
+          <a:lstStyle/>
+          <a:p>
+            <a:pPr algn="ctr"/>
+          </a:p>
+        </p:txBody>
+      </p:sp>
       <p:sp>
         <p:nvSpPr>
           <p:cNvPr id="7" name="TextBox 6"/>
@@ -15524,41 +15569,50 @@
           </a:p>
         </p:txBody>
       </p:sp>
-      <p:cxnSp>
-        <p:nvCxnSpPr>
-          <p:cNvPr id="6" name="Connector 5"/>
-          <p:cNvCxnSpPr/>
-          <p:nvPr/>
-        </p:nvCxnSpPr>
-        <p:spPr>
-          <a:xfrm>
-            <a:off x="566928" y="1591056"/>
-            <a:ext cx="11058113" cy="0"/>
-          </a:xfrm>
-          <a:prstGeom prst="line">
-            <a:avLst/>
-          </a:prstGeom>
-          <a:ln w="12700">
-            <a:solidFill>
-              <a:srgbClr val="D9E0EA"/>
-            </a:solidFill>
+      <p:sp>
+        <p:nvSpPr>
+          <p:cNvPr id="6" name="Rectangle 5"/>
+          <p:cNvSpPr/>
+          <p:nvPr/>
+        </p:nvSpPr>
+        <p:spPr>
+          <a:xfrm>
+            <a:off x="566928" y="1584706"/>
+            <a:ext cx="11058113" cy="12700"/>
+          </a:xfrm>
+          <a:prstGeom prst="rect">
+            <a:avLst/>
+          </a:prstGeom>
+          <a:solidFill>
+            <a:srgbClr val="D9E0EA"/>
+          </a:solidFill>
+          <a:ln>
+            <a:noFill/>
           </a:ln>
+          <a:effectLst/>
         </p:spPr>
         <p:style>
-          <a:lnRef idx="2">
+          <a:lnRef idx="1">
             <a:schemeClr val="accent1"/>
           </a:lnRef>
-          <a:fillRef idx="0">
+          <a:fillRef idx="3">
             <a:schemeClr val="accent1"/>
           </a:fillRef>
-          <a:effectRef idx="1">
+          <a:effectRef idx="2">
             <a:schemeClr val="accent1"/>
           </a:effectRef>
           <a:fontRef idx="minor">
-            <a:schemeClr val="tx1"/>
+            <a:schemeClr val="lt1"/>
           </a:fontRef>
         </p:style>
-      </p:cxnSp>
+        <p:txBody>
+          <a:bodyPr rtlCol="0" anchor="ctr"/>
+          <a:lstStyle/>
+          <a:p>
+            <a:pPr algn="ctr"/>
+          </a:p>
+        </p:txBody>
+      </p:sp>
       <p:sp>
         <p:nvSpPr>
           <p:cNvPr id="7" name="TextBox 6"/>
@@ -16934,41 +16988,50 @@
           </a:p>
         </p:txBody>
       </p:sp>
-      <p:cxnSp>
-        <p:nvCxnSpPr>
-          <p:cNvPr id="6" name="Connector 5"/>
-          <p:cNvCxnSpPr/>
-          <p:nvPr/>
-        </p:nvCxnSpPr>
-        <p:spPr>
-          <a:xfrm>
-            <a:off x="566928" y="1591056"/>
-            <a:ext cx="11058113" cy="0"/>
-          </a:xfrm>
-          <a:prstGeom prst="line">
-            <a:avLst/>
-          </a:prstGeom>
-          <a:ln w="12700">
-            <a:solidFill>
-              <a:srgbClr val="D9E0EA"/>
-            </a:solidFill>
+      <p:sp>
+        <p:nvSpPr>
+          <p:cNvPr id="6" name="Rectangle 5"/>
+          <p:cNvSpPr/>
+          <p:nvPr/>
+        </p:nvSpPr>
+        <p:spPr>
+          <a:xfrm>
+            <a:off x="566928" y="1584706"/>
+            <a:ext cx="11058113" cy="12700"/>
+          </a:xfrm>
+          <a:prstGeom prst="rect">
+            <a:avLst/>
+          </a:prstGeom>
+          <a:solidFill>
+            <a:srgbClr val="D9E0EA"/>
+          </a:solidFill>
+          <a:ln>
+            <a:noFill/>
           </a:ln>
+          <a:effectLst/>
         </p:spPr>
         <p:style>
-          <a:lnRef idx="2">
+          <a:lnRef idx="1">
             <a:schemeClr val="accent1"/>
           </a:lnRef>
-          <a:fillRef idx="0">
+          <a:fillRef idx="3">
             <a:schemeClr val="accent1"/>
           </a:fillRef>
-          <a:effectRef idx="1">
+          <a:effectRef idx="2">
             <a:schemeClr val="accent1"/>
           </a:effectRef>
           <a:fontRef idx="minor">
-            <a:schemeClr val="tx1"/>
+            <a:schemeClr val="lt1"/>
           </a:fontRef>
         </p:style>
-      </p:cxnSp>
+        <p:txBody>
+          <a:bodyPr rtlCol="0" anchor="ctr"/>
+          <a:lstStyle/>
+          <a:p>
+            <a:pPr algn="ctr"/>
+          </a:p>
+        </p:txBody>
+      </p:sp>
       <p:sp>
         <p:nvSpPr>
           <p:cNvPr id="7" name="TextBox 6"/>
@@ -19579,41 +19642,50 @@
           </a:p>
         </p:txBody>
       </p:sp>
-      <p:cxnSp>
-        <p:nvCxnSpPr>
-          <p:cNvPr id="6" name="Connector 5"/>
-          <p:cNvCxnSpPr/>
-          <p:nvPr/>
-        </p:nvCxnSpPr>
-        <p:spPr>
-          <a:xfrm>
-            <a:off x="566928" y="1591056"/>
-            <a:ext cx="11058113" cy="0"/>
-          </a:xfrm>
-          <a:prstGeom prst="line">
-            <a:avLst/>
-          </a:prstGeom>
-          <a:ln w="12700">
-            <a:solidFill>
-              <a:srgbClr val="D9E0EA"/>
-            </a:solidFill>
+      <p:sp>
+        <p:nvSpPr>
+          <p:cNvPr id="6" name="Rectangle 5"/>
+          <p:cNvSpPr/>
+          <p:nvPr/>
+        </p:nvSpPr>
+        <p:spPr>
+          <a:xfrm>
+            <a:off x="566928" y="1584706"/>
+            <a:ext cx="11058113" cy="12700"/>
+          </a:xfrm>
+          <a:prstGeom prst="rect">
+            <a:avLst/>
+          </a:prstGeom>
+          <a:solidFill>
+            <a:srgbClr val="D9E0EA"/>
+          </a:solidFill>
+          <a:ln>
+            <a:noFill/>
           </a:ln>
+          <a:effectLst/>
         </p:spPr>
         <p:style>
-          <a:lnRef idx="2">
+          <a:lnRef idx="1">
             <a:schemeClr val="accent1"/>
           </a:lnRef>
-          <a:fillRef idx="0">
+          <a:fillRef idx="3">
             <a:schemeClr val="accent1"/>
           </a:fillRef>
-          <a:effectRef idx="1">
+          <a:effectRef idx="2">
             <a:schemeClr val="accent1"/>
           </a:effectRef>
           <a:fontRef idx="minor">
-            <a:schemeClr val="tx1"/>
+            <a:schemeClr val="lt1"/>
           </a:fontRef>
         </p:style>
-      </p:cxnSp>
+        <p:txBody>
+          <a:bodyPr rtlCol="0" anchor="ctr"/>
+          <a:lstStyle/>
+          <a:p>
+            <a:pPr algn="ctr"/>
+          </a:p>
+        </p:txBody>
+      </p:sp>
       <p:sp>
         <p:nvSpPr>
           <p:cNvPr id="7" name="TextBox 6"/>
@@ -21069,41 +21141,50 @@
           </a:p>
         </p:txBody>
       </p:sp>
-      <p:cxnSp>
-        <p:nvCxnSpPr>
-          <p:cNvPr id="6" name="Connector 5"/>
-          <p:cNvCxnSpPr/>
-          <p:nvPr/>
-        </p:nvCxnSpPr>
-        <p:spPr>
-          <a:xfrm>
-            <a:off x="566928" y="1591056"/>
-            <a:ext cx="11058113" cy="0"/>
-          </a:xfrm>
-          <a:prstGeom prst="line">
-            <a:avLst/>
-          </a:prstGeom>
-          <a:ln w="12700">
-            <a:solidFill>
-              <a:srgbClr val="D9E0EA"/>
-            </a:solidFill>
+      <p:sp>
+        <p:nvSpPr>
+          <p:cNvPr id="6" name="Rectangle 5"/>
+          <p:cNvSpPr/>
+          <p:nvPr/>
+        </p:nvSpPr>
+        <p:spPr>
+          <a:xfrm>
+            <a:off x="566928" y="1584706"/>
+            <a:ext cx="11058113" cy="12700"/>
+          </a:xfrm>
+          <a:prstGeom prst="rect">
+            <a:avLst/>
+          </a:prstGeom>
+          <a:solidFill>
+            <a:srgbClr val="D9E0EA"/>
+          </a:solidFill>
+          <a:ln>
+            <a:noFill/>
           </a:ln>
+          <a:effectLst/>
         </p:spPr>
         <p:style>
-          <a:lnRef idx="2">
+          <a:lnRef idx="1">
             <a:schemeClr val="accent1"/>
           </a:lnRef>
-          <a:fillRef idx="0">
+          <a:fillRef idx="3">
             <a:schemeClr val="accent1"/>
           </a:fillRef>
-          <a:effectRef idx="1">
+          <a:effectRef idx="2">
             <a:schemeClr val="accent1"/>
           </a:effectRef>
           <a:fontRef idx="minor">
-            <a:schemeClr val="tx1"/>
+            <a:schemeClr val="lt1"/>
           </a:fontRef>
         </p:style>
-      </p:cxnSp>
+        <p:txBody>
+          <a:bodyPr rtlCol="0" anchor="ctr"/>
+          <a:lstStyle/>
+          <a:p>
+            <a:pPr algn="ctr"/>
+          </a:p>
+        </p:txBody>
+      </p:sp>
       <p:sp>
         <p:nvSpPr>
           <p:cNvPr id="7" name="TextBox 6"/>
@@ -22304,41 +22385,50 @@
           </a:p>
         </p:txBody>
       </p:sp>
-      <p:cxnSp>
-        <p:nvCxnSpPr>
-          <p:cNvPr id="37" name="Connector 36"/>
-          <p:cNvCxnSpPr/>
-          <p:nvPr/>
-        </p:nvCxnSpPr>
-        <p:spPr>
-          <a:xfrm>
-            <a:off x="6245352" y="2578608"/>
-            <a:ext cx="5376672" cy="0"/>
-          </a:xfrm>
-          <a:prstGeom prst="line">
-            <a:avLst/>
-          </a:prstGeom>
-          <a:ln w="8890">
-            <a:solidFill>
-              <a:srgbClr val="D9E0EA"/>
-            </a:solidFill>
+      <p:sp>
+        <p:nvSpPr>
+          <p:cNvPr id="37" name="Rectangle 36"/>
+          <p:cNvSpPr/>
+          <p:nvPr/>
+        </p:nvSpPr>
+        <p:spPr>
+          <a:xfrm>
+            <a:off x="6245352" y="2573121"/>
+            <a:ext cx="5376672" cy="10972"/>
+          </a:xfrm>
+          <a:prstGeom prst="rect">
+            <a:avLst/>
+          </a:prstGeom>
+          <a:solidFill>
+            <a:srgbClr val="D9E0EA"/>
+          </a:solidFill>
+          <a:ln>
+            <a:noFill/>
           </a:ln>
+          <a:effectLst/>
         </p:spPr>
         <p:style>
-          <a:lnRef idx="2">
+          <a:lnRef idx="1">
             <a:schemeClr val="accent1"/>
           </a:lnRef>
-          <a:fillRef idx="0">
+          <a:fillRef idx="3">
             <a:schemeClr val="accent1"/>
           </a:fillRef>
-          <a:effectRef idx="1">
+          <a:effectRef idx="2">
             <a:schemeClr val="accent1"/>
           </a:effectRef>
           <a:fontRef idx="minor">
-            <a:schemeClr val="tx1"/>
+            <a:schemeClr val="lt1"/>
           </a:fontRef>
         </p:style>
-      </p:cxnSp>
+        <p:txBody>
+          <a:bodyPr rtlCol="0" anchor="ctr"/>
+          <a:lstStyle/>
+          <a:p>
+            <a:pPr algn="ctr"/>
+          </a:p>
+        </p:txBody>
+      </p:sp>
       <p:sp>
         <p:nvSpPr>
           <p:cNvPr id="38" name="TextBox 37"/>
@@ -22411,41 +22501,50 @@
           </a:p>
         </p:txBody>
       </p:sp>
-      <p:cxnSp>
-        <p:nvCxnSpPr>
-          <p:cNvPr id="40" name="Connector 39"/>
-          <p:cNvCxnSpPr/>
-          <p:nvPr/>
-        </p:nvCxnSpPr>
-        <p:spPr>
-          <a:xfrm>
-            <a:off x="6245352" y="3076956"/>
-            <a:ext cx="5376672" cy="0"/>
-          </a:xfrm>
-          <a:prstGeom prst="line">
-            <a:avLst/>
-          </a:prstGeom>
-          <a:ln w="8890">
-            <a:solidFill>
-              <a:srgbClr val="D9E0EA"/>
-            </a:solidFill>
+      <p:sp>
+        <p:nvSpPr>
+          <p:cNvPr id="40" name="Rectangle 39"/>
+          <p:cNvSpPr/>
+          <p:nvPr/>
+        </p:nvSpPr>
+        <p:spPr>
+          <a:xfrm>
+            <a:off x="6245352" y="3071469"/>
+            <a:ext cx="5376672" cy="10972"/>
+          </a:xfrm>
+          <a:prstGeom prst="rect">
+            <a:avLst/>
+          </a:prstGeom>
+          <a:solidFill>
+            <a:srgbClr val="D9E0EA"/>
+          </a:solidFill>
+          <a:ln>
+            <a:noFill/>
           </a:ln>
+          <a:effectLst/>
         </p:spPr>
         <p:style>
-          <a:lnRef idx="2">
+          <a:lnRef idx="1">
             <a:schemeClr val="accent1"/>
           </a:lnRef>
-          <a:fillRef idx="0">
+          <a:fillRef idx="3">
             <a:schemeClr val="accent1"/>
           </a:fillRef>
-          <a:effectRef idx="1">
+          <a:effectRef idx="2">
             <a:schemeClr val="accent1"/>
           </a:effectRef>
           <a:fontRef idx="minor">
-            <a:schemeClr val="tx1"/>
+            <a:schemeClr val="lt1"/>
           </a:fontRef>
         </p:style>
-      </p:cxnSp>
+        <p:txBody>
+          <a:bodyPr rtlCol="0" anchor="ctr"/>
+          <a:lstStyle/>
+          <a:p>
+            <a:pPr algn="ctr"/>
+          </a:p>
+        </p:txBody>
+      </p:sp>
       <p:sp>
         <p:nvSpPr>
           <p:cNvPr id="41" name="TextBox 40"/>
@@ -22518,41 +22617,50 @@
           </a:p>
         </p:txBody>
       </p:sp>
-      <p:cxnSp>
-        <p:nvCxnSpPr>
-          <p:cNvPr id="43" name="Connector 42"/>
-          <p:cNvCxnSpPr/>
-          <p:nvPr/>
-        </p:nvCxnSpPr>
-        <p:spPr>
-          <a:xfrm>
-            <a:off x="6245352" y="3575303"/>
-            <a:ext cx="5376672" cy="0"/>
-          </a:xfrm>
-          <a:prstGeom prst="line">
-            <a:avLst/>
-          </a:prstGeom>
-          <a:ln w="8890">
-            <a:solidFill>
-              <a:srgbClr val="D9E0EA"/>
-            </a:solidFill>
+      <p:sp>
+        <p:nvSpPr>
+          <p:cNvPr id="43" name="Rectangle 42"/>
+          <p:cNvSpPr/>
+          <p:nvPr/>
+        </p:nvSpPr>
+        <p:spPr>
+          <a:xfrm>
+            <a:off x="6245352" y="3569817"/>
+            <a:ext cx="5376672" cy="10972"/>
+          </a:xfrm>
+          <a:prstGeom prst="rect">
+            <a:avLst/>
+          </a:prstGeom>
+          <a:solidFill>
+            <a:srgbClr val="D9E0EA"/>
+          </a:solidFill>
+          <a:ln>
+            <a:noFill/>
           </a:ln>
+          <a:effectLst/>
         </p:spPr>
         <p:style>
-          <a:lnRef idx="2">
+          <a:lnRef idx="1">
             <a:schemeClr val="accent1"/>
           </a:lnRef>
-          <a:fillRef idx="0">
+          <a:fillRef idx="3">
             <a:schemeClr val="accent1"/>
           </a:fillRef>
-          <a:effectRef idx="1">
+          <a:effectRef idx="2">
             <a:schemeClr val="accent1"/>
           </a:effectRef>
           <a:fontRef idx="minor">
-            <a:schemeClr val="tx1"/>
+            <a:schemeClr val="lt1"/>
           </a:fontRef>
         </p:style>
-      </p:cxnSp>
+        <p:txBody>
+          <a:bodyPr rtlCol="0" anchor="ctr"/>
+          <a:lstStyle/>
+          <a:p>
+            <a:pPr algn="ctr"/>
+          </a:p>
+        </p:txBody>
+      </p:sp>
       <p:sp>
         <p:nvSpPr>
           <p:cNvPr id="44" name="TextBox 43"/>
@@ -22625,41 +22733,50 @@
           </a:p>
         </p:txBody>
       </p:sp>
-      <p:cxnSp>
-        <p:nvCxnSpPr>
-          <p:cNvPr id="46" name="Connector 45"/>
-          <p:cNvCxnSpPr/>
-          <p:nvPr/>
-        </p:nvCxnSpPr>
-        <p:spPr>
-          <a:xfrm>
-            <a:off x="6245352" y="4073652"/>
-            <a:ext cx="5376672" cy="0"/>
-          </a:xfrm>
-          <a:prstGeom prst="line">
-            <a:avLst/>
-          </a:prstGeom>
-          <a:ln w="8890">
-            <a:solidFill>
-              <a:srgbClr val="D9E0EA"/>
-            </a:solidFill>
+      <p:sp>
+        <p:nvSpPr>
+          <p:cNvPr id="46" name="Rectangle 45"/>
+          <p:cNvSpPr/>
+          <p:nvPr/>
+        </p:nvSpPr>
+        <p:spPr>
+          <a:xfrm>
+            <a:off x="6245352" y="4068165"/>
+            <a:ext cx="5376672" cy="10972"/>
+          </a:xfrm>
+          <a:prstGeom prst="rect">
+            <a:avLst/>
+          </a:prstGeom>
+          <a:solidFill>
+            <a:srgbClr val="D9E0EA"/>
+          </a:solidFill>
+          <a:ln>
+            <a:noFill/>
           </a:ln>
+          <a:effectLst/>
         </p:spPr>
         <p:style>
-          <a:lnRef idx="2">
+          <a:lnRef idx="1">
             <a:schemeClr val="accent1"/>
           </a:lnRef>
-          <a:fillRef idx="0">
+          <a:fillRef idx="3">
             <a:schemeClr val="accent1"/>
           </a:fillRef>
-          <a:effectRef idx="1">
+          <a:effectRef idx="2">
             <a:schemeClr val="accent1"/>
           </a:effectRef>
           <a:fontRef idx="minor">
-            <a:schemeClr val="tx1"/>
+            <a:schemeClr val="lt1"/>
           </a:fontRef>
         </p:style>
-      </p:cxnSp>
+        <p:txBody>
+          <a:bodyPr rtlCol="0" anchor="ctr"/>
+          <a:lstStyle/>
+          <a:p>
+            <a:pPr algn="ctr"/>
+          </a:p>
+        </p:txBody>
+      </p:sp>
       <p:sp>
         <p:nvSpPr>
           <p:cNvPr id="47" name="TextBox 46"/>
@@ -22732,41 +22849,50 @@
           </a:p>
         </p:txBody>
       </p:sp>
-      <p:cxnSp>
-        <p:nvCxnSpPr>
-          <p:cNvPr id="49" name="Connector 48"/>
-          <p:cNvCxnSpPr/>
-          <p:nvPr/>
-        </p:nvCxnSpPr>
-        <p:spPr>
-          <a:xfrm>
-            <a:off x="6245352" y="4572000"/>
-            <a:ext cx="5376672" cy="0"/>
-          </a:xfrm>
-          <a:prstGeom prst="line">
-            <a:avLst/>
-          </a:prstGeom>
-          <a:ln w="8890">
-            <a:solidFill>
-              <a:srgbClr val="D9E0EA"/>
-            </a:solidFill>
+      <p:sp>
+        <p:nvSpPr>
+          <p:cNvPr id="49" name="Rectangle 48"/>
+          <p:cNvSpPr/>
+          <p:nvPr/>
+        </p:nvSpPr>
+        <p:spPr>
+          <a:xfrm>
+            <a:off x="6245352" y="4566513"/>
+            <a:ext cx="5376672" cy="10972"/>
+          </a:xfrm>
+          <a:prstGeom prst="rect">
+            <a:avLst/>
+          </a:prstGeom>
+          <a:solidFill>
+            <a:srgbClr val="D9E0EA"/>
+          </a:solidFill>
+          <a:ln>
+            <a:noFill/>
           </a:ln>
+          <a:effectLst/>
         </p:spPr>
         <p:style>
-          <a:lnRef idx="2">
+          <a:lnRef idx="1">
             <a:schemeClr val="accent1"/>
           </a:lnRef>
-          <a:fillRef idx="0">
+          <a:fillRef idx="3">
             <a:schemeClr val="accent1"/>
           </a:fillRef>
-          <a:effectRef idx="1">
+          <a:effectRef idx="2">
             <a:schemeClr val="accent1"/>
           </a:effectRef>
           <a:fontRef idx="minor">
-            <a:schemeClr val="tx1"/>
+            <a:schemeClr val="lt1"/>
           </a:fontRef>
         </p:style>
-      </p:cxnSp>
+        <p:txBody>
+          <a:bodyPr rtlCol="0" anchor="ctr"/>
+          <a:lstStyle/>
+          <a:p>
+            <a:pPr algn="ctr"/>
+          </a:p>
+        </p:txBody>
+      </p:sp>
       <p:sp>
         <p:nvSpPr>
           <p:cNvPr id="50" name="TextBox 49"/>
@@ -22839,41 +22965,50 @@
           </a:p>
         </p:txBody>
       </p:sp>
-      <p:cxnSp>
-        <p:nvCxnSpPr>
-          <p:cNvPr id="52" name="Connector 51"/>
-          <p:cNvCxnSpPr/>
-          <p:nvPr/>
-        </p:nvCxnSpPr>
-        <p:spPr>
-          <a:xfrm>
-            <a:off x="6245352" y="5070348"/>
-            <a:ext cx="5376672" cy="0"/>
-          </a:xfrm>
-          <a:prstGeom prst="line">
-            <a:avLst/>
-          </a:prstGeom>
-          <a:ln w="8890">
-            <a:solidFill>
-              <a:srgbClr val="D9E0EA"/>
-            </a:solidFill>
+      <p:sp>
+        <p:nvSpPr>
+          <p:cNvPr id="52" name="Rectangle 51"/>
+          <p:cNvSpPr/>
+          <p:nvPr/>
+        </p:nvSpPr>
+        <p:spPr>
+          <a:xfrm>
+            <a:off x="6245352" y="5064861"/>
+            <a:ext cx="5376672" cy="10972"/>
+          </a:xfrm>
+          <a:prstGeom prst="rect">
+            <a:avLst/>
+          </a:prstGeom>
+          <a:solidFill>
+            <a:srgbClr val="D9E0EA"/>
+          </a:solidFill>
+          <a:ln>
+            <a:noFill/>
           </a:ln>
+          <a:effectLst/>
         </p:spPr>
         <p:style>
-          <a:lnRef idx="2">
+          <a:lnRef idx="1">
             <a:schemeClr val="accent1"/>
           </a:lnRef>
-          <a:fillRef idx="0">
+          <a:fillRef idx="3">
             <a:schemeClr val="accent1"/>
           </a:fillRef>
-          <a:effectRef idx="1">
+          <a:effectRef idx="2">
             <a:schemeClr val="accent1"/>
           </a:effectRef>
           <a:fontRef idx="minor">
-            <a:schemeClr val="tx1"/>
+            <a:schemeClr val="lt1"/>
           </a:fontRef>
         </p:style>
-      </p:cxnSp>
+        <p:txBody>
+          <a:bodyPr rtlCol="0" anchor="ctr"/>
+          <a:lstStyle/>
+          <a:p>
+            <a:pPr algn="ctr"/>
+          </a:p>
+        </p:txBody>
+      </p:sp>
       <p:sp>
         <p:nvSpPr>
           <p:cNvPr id="53" name="TextBox 52"/>
@@ -22946,41 +23081,50 @@
           </a:p>
         </p:txBody>
       </p:sp>
-      <p:cxnSp>
-        <p:nvCxnSpPr>
-          <p:cNvPr id="55" name="Connector 54"/>
-          <p:cNvCxnSpPr/>
-          <p:nvPr/>
-        </p:nvCxnSpPr>
-        <p:spPr>
-          <a:xfrm>
-            <a:off x="6245352" y="5568696"/>
-            <a:ext cx="5376672" cy="0"/>
-          </a:xfrm>
-          <a:prstGeom prst="line">
-            <a:avLst/>
-          </a:prstGeom>
-          <a:ln w="8890">
-            <a:solidFill>
-              <a:srgbClr val="D9E0EA"/>
-            </a:solidFill>
+      <p:sp>
+        <p:nvSpPr>
+          <p:cNvPr id="55" name="Rectangle 54"/>
+          <p:cNvSpPr/>
+          <p:nvPr/>
+        </p:nvSpPr>
+        <p:spPr>
+          <a:xfrm>
+            <a:off x="6245352" y="5563209"/>
+            <a:ext cx="5376672" cy="10972"/>
+          </a:xfrm>
+          <a:prstGeom prst="rect">
+            <a:avLst/>
+          </a:prstGeom>
+          <a:solidFill>
+            <a:srgbClr val="D9E0EA"/>
+          </a:solidFill>
+          <a:ln>
+            <a:noFill/>
           </a:ln>
+          <a:effectLst/>
         </p:spPr>
         <p:style>
-          <a:lnRef idx="2">
+          <a:lnRef idx="1">
             <a:schemeClr val="accent1"/>
           </a:lnRef>
-          <a:fillRef idx="0">
+          <a:fillRef idx="3">
             <a:schemeClr val="accent1"/>
           </a:fillRef>
-          <a:effectRef idx="1">
+          <a:effectRef idx="2">
             <a:schemeClr val="accent1"/>
           </a:effectRef>
           <a:fontRef idx="minor">
-            <a:schemeClr val="tx1"/>
+            <a:schemeClr val="lt1"/>
           </a:fontRef>
         </p:style>
-      </p:cxnSp>
+        <p:txBody>
+          <a:bodyPr rtlCol="0" anchor="ctr"/>
+          <a:lstStyle/>
+          <a:p>
+            <a:pPr algn="ctr"/>
+          </a:p>
+        </p:txBody>
+      </p:sp>
       <p:sp>
         <p:nvSpPr>
           <p:cNvPr id="56" name="TextBox 55"/>
@@ -23053,41 +23197,50 @@
           </a:p>
         </p:txBody>
       </p:sp>
-      <p:cxnSp>
-        <p:nvCxnSpPr>
-          <p:cNvPr id="58" name="Connector 57"/>
-          <p:cNvCxnSpPr/>
-          <p:nvPr/>
-        </p:nvCxnSpPr>
-        <p:spPr>
-          <a:xfrm>
-            <a:off x="6245352" y="6067044"/>
-            <a:ext cx="5376672" cy="0"/>
-          </a:xfrm>
-          <a:prstGeom prst="line">
-            <a:avLst/>
-          </a:prstGeom>
-          <a:ln w="8890">
-            <a:solidFill>
-              <a:srgbClr val="D9E0EA"/>
-            </a:solidFill>
+      <p:sp>
+        <p:nvSpPr>
+          <p:cNvPr id="58" name="Rectangle 57"/>
+          <p:cNvSpPr/>
+          <p:nvPr/>
+        </p:nvSpPr>
+        <p:spPr>
+          <a:xfrm>
+            <a:off x="6245352" y="6061557"/>
+            <a:ext cx="5376672" cy="10972"/>
+          </a:xfrm>
+          <a:prstGeom prst="rect">
+            <a:avLst/>
+          </a:prstGeom>
+          <a:solidFill>
+            <a:srgbClr val="D9E0EA"/>
+          </a:solidFill>
+          <a:ln>
+            <a:noFill/>
           </a:ln>
+          <a:effectLst/>
         </p:spPr>
         <p:style>
-          <a:lnRef idx="2">
+          <a:lnRef idx="1">
             <a:schemeClr val="accent1"/>
           </a:lnRef>
-          <a:fillRef idx="0">
+          <a:fillRef idx="3">
             <a:schemeClr val="accent1"/>
           </a:fillRef>
-          <a:effectRef idx="1">
+          <a:effectRef idx="2">
             <a:schemeClr val="accent1"/>
           </a:effectRef>
           <a:fontRef idx="minor">
-            <a:schemeClr val="tx1"/>
+            <a:schemeClr val="lt1"/>
           </a:fontRef>
         </p:style>
-      </p:cxnSp>
+        <p:txBody>
+          <a:bodyPr rtlCol="0" anchor="ctr"/>
+          <a:lstStyle/>
+          <a:p>
+            <a:pPr algn="ctr"/>
+          </a:p>
+        </p:txBody>
+      </p:sp>
       <p:sp>
         <p:nvSpPr>
           <p:cNvPr id="59" name="Rounded Rectangle 58"/>
@@ -23352,41 +23505,50 @@
           </a:p>
         </p:txBody>
       </p:sp>
-      <p:cxnSp>
-        <p:nvCxnSpPr>
-          <p:cNvPr id="6" name="Connector 5"/>
-          <p:cNvCxnSpPr/>
-          <p:nvPr/>
-        </p:nvCxnSpPr>
-        <p:spPr>
-          <a:xfrm>
-            <a:off x="566928" y="1591056"/>
-            <a:ext cx="11058113" cy="0"/>
-          </a:xfrm>
-          <a:prstGeom prst="line">
-            <a:avLst/>
-          </a:prstGeom>
-          <a:ln w="12700">
-            <a:solidFill>
-              <a:srgbClr val="D9E0EA"/>
-            </a:solidFill>
+      <p:sp>
+        <p:nvSpPr>
+          <p:cNvPr id="6" name="Rectangle 5"/>
+          <p:cNvSpPr/>
+          <p:nvPr/>
+        </p:nvSpPr>
+        <p:spPr>
+          <a:xfrm>
+            <a:off x="566928" y="1584706"/>
+            <a:ext cx="11058113" cy="12700"/>
+          </a:xfrm>
+          <a:prstGeom prst="rect">
+            <a:avLst/>
+          </a:prstGeom>
+          <a:solidFill>
+            <a:srgbClr val="D9E0EA"/>
+          </a:solidFill>
+          <a:ln>
+            <a:noFill/>
           </a:ln>
+          <a:effectLst/>
         </p:spPr>
         <p:style>
-          <a:lnRef idx="2">
+          <a:lnRef idx="1">
             <a:schemeClr val="accent1"/>
           </a:lnRef>
-          <a:fillRef idx="0">
+          <a:fillRef idx="3">
             <a:schemeClr val="accent1"/>
           </a:fillRef>
-          <a:effectRef idx="1">
+          <a:effectRef idx="2">
             <a:schemeClr val="accent1"/>
           </a:effectRef>
           <a:fontRef idx="minor">
-            <a:schemeClr val="tx1"/>
+            <a:schemeClr val="lt1"/>
           </a:fontRef>
         </p:style>
-      </p:cxnSp>
+        <p:txBody>
+          <a:bodyPr rtlCol="0" anchor="ctr"/>
+          <a:lstStyle/>
+          <a:p>
+            <a:pPr algn="ctr"/>
+          </a:p>
+        </p:txBody>
+      </p:sp>
       <p:sp>
         <p:nvSpPr>
           <p:cNvPr id="7" name="TextBox 6"/>
@@ -24268,41 +24430,50 @@
           </a:p>
         </p:txBody>
       </p:sp>
-      <p:cxnSp>
-        <p:nvCxnSpPr>
-          <p:cNvPr id="6" name="Connector 5"/>
-          <p:cNvCxnSpPr/>
-          <p:nvPr/>
-        </p:nvCxnSpPr>
-        <p:spPr>
-          <a:xfrm>
-            <a:off x="566928" y="1591056"/>
-            <a:ext cx="11058113" cy="0"/>
-          </a:xfrm>
-          <a:prstGeom prst="line">
-            <a:avLst/>
-          </a:prstGeom>
-          <a:ln w="12700">
-            <a:solidFill>
-              <a:srgbClr val="D9E0EA"/>
-            </a:solidFill>
+      <p:sp>
+        <p:nvSpPr>
+          <p:cNvPr id="6" name="Rectangle 5"/>
+          <p:cNvSpPr/>
+          <p:nvPr/>
+        </p:nvSpPr>
+        <p:spPr>
+          <a:xfrm>
+            <a:off x="566928" y="1584706"/>
+            <a:ext cx="11058113" cy="12700"/>
+          </a:xfrm>
+          <a:prstGeom prst="rect">
+            <a:avLst/>
+          </a:prstGeom>
+          <a:solidFill>
+            <a:srgbClr val="D9E0EA"/>
+          </a:solidFill>
+          <a:ln>
+            <a:noFill/>
           </a:ln>
+          <a:effectLst/>
         </p:spPr>
         <p:style>
-          <a:lnRef idx="2">
+          <a:lnRef idx="1">
             <a:schemeClr val="accent1"/>
           </a:lnRef>
-          <a:fillRef idx="0">
+          <a:fillRef idx="3">
             <a:schemeClr val="accent1"/>
           </a:fillRef>
-          <a:effectRef idx="1">
+          <a:effectRef idx="2">
             <a:schemeClr val="accent1"/>
           </a:effectRef>
           <a:fontRef idx="minor">
-            <a:schemeClr val="tx1"/>
+            <a:schemeClr val="lt1"/>
           </a:fontRef>
         </p:style>
-      </p:cxnSp>
+        <p:txBody>
+          <a:bodyPr rtlCol="0" anchor="ctr"/>
+          <a:lstStyle/>
+          <a:p>
+            <a:pPr algn="ctr"/>
+          </a:p>
+        </p:txBody>
+      </p:sp>
       <p:sp>
         <p:nvSpPr>
           <p:cNvPr id="7" name="TextBox 6"/>
@@ -25391,41 +25562,50 @@
           </a:p>
         </p:txBody>
       </p:sp>
-      <p:cxnSp>
-        <p:nvCxnSpPr>
-          <p:cNvPr id="6" name="Connector 5"/>
-          <p:cNvCxnSpPr/>
-          <p:nvPr/>
-        </p:nvCxnSpPr>
-        <p:spPr>
-          <a:xfrm>
-            <a:off x="566928" y="1591056"/>
-            <a:ext cx="11058113" cy="0"/>
-          </a:xfrm>
-          <a:prstGeom prst="line">
-            <a:avLst/>
-          </a:prstGeom>
-          <a:ln w="12700">
-            <a:solidFill>
-              <a:srgbClr val="D9E0EA"/>
-            </a:solidFill>
+      <p:sp>
+        <p:nvSpPr>
+          <p:cNvPr id="6" name="Rectangle 5"/>
+          <p:cNvSpPr/>
+          <p:nvPr/>
+        </p:nvSpPr>
+        <p:spPr>
+          <a:xfrm>
+            <a:off x="566928" y="1584706"/>
+            <a:ext cx="11058113" cy="12700"/>
+          </a:xfrm>
+          <a:prstGeom prst="rect">
+            <a:avLst/>
+          </a:prstGeom>
+          <a:solidFill>
+            <a:srgbClr val="D9E0EA"/>
+          </a:solidFill>
+          <a:ln>
+            <a:noFill/>
           </a:ln>
+          <a:effectLst/>
         </p:spPr>
         <p:style>
-          <a:lnRef idx="2">
+          <a:lnRef idx="1">
             <a:schemeClr val="accent1"/>
           </a:lnRef>
-          <a:fillRef idx="0">
+          <a:fillRef idx="3">
             <a:schemeClr val="accent1"/>
           </a:fillRef>
-          <a:effectRef idx="1">
+          <a:effectRef idx="2">
             <a:schemeClr val="accent1"/>
           </a:effectRef>
           <a:fontRef idx="minor">
-            <a:schemeClr val="tx1"/>
+            <a:schemeClr val="lt1"/>
           </a:fontRef>
         </p:style>
-      </p:cxnSp>
+        <p:txBody>
+          <a:bodyPr rtlCol="0" anchor="ctr"/>
+          <a:lstStyle/>
+          <a:p>
+            <a:pPr algn="ctr"/>
+          </a:p>
+        </p:txBody>
+      </p:sp>
       <p:sp>
         <p:nvSpPr>
           <p:cNvPr id="7" name="TextBox 6"/>
@@ -26528,41 +26708,50 @@
           </a:p>
         </p:txBody>
       </p:sp>
-      <p:cxnSp>
-        <p:nvCxnSpPr>
-          <p:cNvPr id="6" name="Connector 5"/>
-          <p:cNvCxnSpPr/>
-          <p:nvPr/>
-        </p:nvCxnSpPr>
-        <p:spPr>
-          <a:xfrm>
-            <a:off x="566928" y="1591056"/>
-            <a:ext cx="11058113" cy="0"/>
-          </a:xfrm>
-          <a:prstGeom prst="line">
-            <a:avLst/>
-          </a:prstGeom>
-          <a:ln w="12700">
-            <a:solidFill>
-              <a:srgbClr val="D9E0EA"/>
-            </a:solidFill>
+      <p:sp>
+        <p:nvSpPr>
+          <p:cNvPr id="6" name="Rectangle 5"/>
+          <p:cNvSpPr/>
+          <p:nvPr/>
+        </p:nvSpPr>
+        <p:spPr>
+          <a:xfrm>
+            <a:off x="566928" y="1584706"/>
+            <a:ext cx="11058113" cy="12700"/>
+          </a:xfrm>
+          <a:prstGeom prst="rect">
+            <a:avLst/>
+          </a:prstGeom>
+          <a:solidFill>
+            <a:srgbClr val="D9E0EA"/>
+          </a:solidFill>
+          <a:ln>
+            <a:noFill/>
           </a:ln>
+          <a:effectLst/>
         </p:spPr>
         <p:style>
-          <a:lnRef idx="2">
+          <a:lnRef idx="1">
             <a:schemeClr val="accent1"/>
           </a:lnRef>
-          <a:fillRef idx="0">
+          <a:fillRef idx="3">
             <a:schemeClr val="accent1"/>
           </a:fillRef>
-          <a:effectRef idx="1">
+          <a:effectRef idx="2">
             <a:schemeClr val="accent1"/>
           </a:effectRef>
           <a:fontRef idx="minor">
-            <a:schemeClr val="tx1"/>
+            <a:schemeClr val="lt1"/>
           </a:fontRef>
         </p:style>
-      </p:cxnSp>
+        <p:txBody>
+          <a:bodyPr rtlCol="0" anchor="ctr"/>
+          <a:lstStyle/>
+          <a:p>
+            <a:pPr algn="ctr"/>
+          </a:p>
+        </p:txBody>
+      </p:sp>
       <p:sp>
         <p:nvSpPr>
           <p:cNvPr id="7" name="TextBox 6"/>
@@ -26635,76 +26824,94 @@
           </a:p>
         </p:txBody>
       </p:sp>
-      <p:cxnSp>
-        <p:nvCxnSpPr>
-          <p:cNvPr id="9" name="Connector 8"/>
-          <p:cNvCxnSpPr/>
-          <p:nvPr/>
-        </p:nvCxnSpPr>
-        <p:spPr>
-          <a:xfrm>
-            <a:off x="2743200" y="1847088"/>
-            <a:ext cx="8878824" cy="0"/>
-          </a:xfrm>
-          <a:prstGeom prst="line">
-            <a:avLst/>
-          </a:prstGeom>
-          <a:ln w="12700">
-            <a:solidFill>
-              <a:srgbClr val="D9E0EA"/>
-            </a:solidFill>
+      <p:sp>
+        <p:nvSpPr>
+          <p:cNvPr id="9" name="Rectangle 8"/>
+          <p:cNvSpPr/>
+          <p:nvPr/>
+        </p:nvSpPr>
+        <p:spPr>
+          <a:xfrm>
+            <a:off x="2743200" y="1840737"/>
+            <a:ext cx="8878824" cy="12700"/>
+          </a:xfrm>
+          <a:prstGeom prst="rect">
+            <a:avLst/>
+          </a:prstGeom>
+          <a:solidFill>
+            <a:srgbClr val="D9E0EA"/>
+          </a:solidFill>
+          <a:ln>
+            <a:noFill/>
           </a:ln>
+          <a:effectLst/>
         </p:spPr>
         <p:style>
-          <a:lnRef idx="2">
+          <a:lnRef idx="1">
             <a:schemeClr val="accent1"/>
           </a:lnRef>
-          <a:fillRef idx="0">
+          <a:fillRef idx="3">
             <a:schemeClr val="accent1"/>
           </a:fillRef>
-          <a:effectRef idx="1">
+          <a:effectRef idx="2">
             <a:schemeClr val="accent1"/>
           </a:effectRef>
           <a:fontRef idx="minor">
-            <a:schemeClr val="tx1"/>
+            <a:schemeClr val="lt1"/>
           </a:fontRef>
         </p:style>
-      </p:cxnSp>
-      <p:cxnSp>
-        <p:nvCxnSpPr>
-          <p:cNvPr id="10" name="Connector 9"/>
-          <p:cNvCxnSpPr/>
-          <p:nvPr/>
-        </p:nvCxnSpPr>
-        <p:spPr>
-          <a:xfrm>
-            <a:off x="2743200" y="1847088"/>
-            <a:ext cx="0" cy="54864"/>
-          </a:xfrm>
-          <a:prstGeom prst="line">
-            <a:avLst/>
-          </a:prstGeom>
-          <a:ln w="12700">
-            <a:solidFill>
-              <a:srgbClr val="D9E0EA"/>
-            </a:solidFill>
+        <p:txBody>
+          <a:bodyPr rtlCol="0" anchor="ctr"/>
+          <a:lstStyle/>
+          <a:p>
+            <a:pPr algn="ctr"/>
+          </a:p>
+        </p:txBody>
+      </p:sp>
+      <p:sp>
+        <p:nvSpPr>
+          <p:cNvPr id="10" name="Rectangle 9"/>
+          <p:cNvSpPr/>
+          <p:nvPr/>
+        </p:nvSpPr>
+        <p:spPr>
+          <a:xfrm>
+            <a:off x="2736850" y="1847088"/>
+            <a:ext cx="12700" cy="54864"/>
+          </a:xfrm>
+          <a:prstGeom prst="rect">
+            <a:avLst/>
+          </a:prstGeom>
+          <a:solidFill>
+            <a:srgbClr val="D9E0EA"/>
+          </a:solidFill>
+          <a:ln>
+            <a:noFill/>
           </a:ln>
+          <a:effectLst/>
         </p:spPr>
         <p:style>
-          <a:lnRef idx="2">
+          <a:lnRef idx="1">
             <a:schemeClr val="accent1"/>
           </a:lnRef>
-          <a:fillRef idx="0">
+          <a:fillRef idx="3">
             <a:schemeClr val="accent1"/>
           </a:fillRef>
-          <a:effectRef idx="1">
+          <a:effectRef idx="2">
             <a:schemeClr val="accent1"/>
           </a:effectRef>
           <a:fontRef idx="minor">
-            <a:schemeClr val="tx1"/>
+            <a:schemeClr val="lt1"/>
           </a:fontRef>
         </p:style>
-      </p:cxnSp>
+        <p:txBody>
+          <a:bodyPr rtlCol="0" anchor="ctr"/>
+          <a:lstStyle/>
+          <a:p>
+            <a:pPr algn="ctr"/>
+          </a:p>
+        </p:txBody>
+      </p:sp>
       <p:sp>
         <p:nvSpPr>
           <p:cNvPr id="11" name="TextBox 10"/>
@@ -26741,76 +26948,94 @@
           </a:p>
         </p:txBody>
       </p:sp>
-      <p:cxnSp>
-        <p:nvCxnSpPr>
-          <p:cNvPr id="12" name="Connector 11"/>
-          <p:cNvCxnSpPr/>
-          <p:nvPr/>
-        </p:nvCxnSpPr>
-        <p:spPr>
-          <a:xfrm>
-            <a:off x="3729736" y="1847088"/>
-            <a:ext cx="0" cy="54864"/>
-          </a:xfrm>
-          <a:prstGeom prst="line">
-            <a:avLst/>
-          </a:prstGeom>
-          <a:ln w="12700">
-            <a:solidFill>
-              <a:srgbClr val="D9E0EA"/>
-            </a:solidFill>
+      <p:sp>
+        <p:nvSpPr>
+          <p:cNvPr id="12" name="Rectangle 11"/>
+          <p:cNvSpPr/>
+          <p:nvPr/>
+        </p:nvSpPr>
+        <p:spPr>
+          <a:xfrm>
+            <a:off x="3723385" y="1847088"/>
+            <a:ext cx="12700" cy="54864"/>
+          </a:xfrm>
+          <a:prstGeom prst="rect">
+            <a:avLst/>
+          </a:prstGeom>
+          <a:solidFill>
+            <a:srgbClr val="D9E0EA"/>
+          </a:solidFill>
+          <a:ln>
+            <a:noFill/>
           </a:ln>
+          <a:effectLst/>
         </p:spPr>
         <p:style>
-          <a:lnRef idx="2">
+          <a:lnRef idx="1">
             <a:schemeClr val="accent1"/>
           </a:lnRef>
-          <a:fillRef idx="0">
+          <a:fillRef idx="3">
             <a:schemeClr val="accent1"/>
           </a:fillRef>
-          <a:effectRef idx="1">
+          <a:effectRef idx="2">
             <a:schemeClr val="accent1"/>
           </a:effectRef>
           <a:fontRef idx="minor">
-            <a:schemeClr val="tx1"/>
+            <a:schemeClr val="lt1"/>
           </a:fontRef>
         </p:style>
-      </p:cxnSp>
-      <p:cxnSp>
-        <p:nvCxnSpPr>
-          <p:cNvPr id="13" name="Connector 12"/>
-          <p:cNvCxnSpPr/>
-          <p:nvPr/>
-        </p:nvCxnSpPr>
-        <p:spPr>
-          <a:xfrm>
-            <a:off x="4716272" y="1847088"/>
-            <a:ext cx="0" cy="54864"/>
-          </a:xfrm>
-          <a:prstGeom prst="line">
-            <a:avLst/>
-          </a:prstGeom>
-          <a:ln w="12700">
-            <a:solidFill>
-              <a:srgbClr val="D9E0EA"/>
-            </a:solidFill>
+        <p:txBody>
+          <a:bodyPr rtlCol="0" anchor="ctr"/>
+          <a:lstStyle/>
+          <a:p>
+            <a:pPr algn="ctr"/>
+          </a:p>
+        </p:txBody>
+      </p:sp>
+      <p:sp>
+        <p:nvSpPr>
+          <p:cNvPr id="13" name="Rectangle 12"/>
+          <p:cNvSpPr/>
+          <p:nvPr/>
+        </p:nvSpPr>
+        <p:spPr>
+          <a:xfrm>
+            <a:off x="4709922" y="1847088"/>
+            <a:ext cx="12700" cy="54864"/>
+          </a:xfrm>
+          <a:prstGeom prst="rect">
+            <a:avLst/>
+          </a:prstGeom>
+          <a:solidFill>
+            <a:srgbClr val="D9E0EA"/>
+          </a:solidFill>
+          <a:ln>
+            <a:noFill/>
           </a:ln>
+          <a:effectLst/>
         </p:spPr>
         <p:style>
-          <a:lnRef idx="2">
+          <a:lnRef idx="1">
             <a:schemeClr val="accent1"/>
           </a:lnRef>
-          <a:fillRef idx="0">
+          <a:fillRef idx="3">
             <a:schemeClr val="accent1"/>
           </a:fillRef>
-          <a:effectRef idx="1">
+          <a:effectRef idx="2">
             <a:schemeClr val="accent1"/>
           </a:effectRef>
           <a:fontRef idx="minor">
-            <a:schemeClr val="tx1"/>
+            <a:schemeClr val="lt1"/>
           </a:fontRef>
         </p:style>
-      </p:cxnSp>
+        <p:txBody>
+          <a:bodyPr rtlCol="0" anchor="ctr"/>
+          <a:lstStyle/>
+          <a:p>
+            <a:pPr algn="ctr"/>
+          </a:p>
+        </p:txBody>
+      </p:sp>
       <p:sp>
         <p:nvSpPr>
           <p:cNvPr id="14" name="TextBox 13"/>
@@ -26847,76 +27072,94 @@
           </a:p>
         </p:txBody>
       </p:sp>
-      <p:cxnSp>
-        <p:nvCxnSpPr>
-          <p:cNvPr id="15" name="Connector 14"/>
-          <p:cNvCxnSpPr/>
-          <p:nvPr/>
-        </p:nvCxnSpPr>
-        <p:spPr>
-          <a:xfrm>
-            <a:off x="5702808" y="1847088"/>
-            <a:ext cx="0" cy="54864"/>
-          </a:xfrm>
-          <a:prstGeom prst="line">
-            <a:avLst/>
-          </a:prstGeom>
-          <a:ln w="12700">
-            <a:solidFill>
-              <a:srgbClr val="D9E0EA"/>
-            </a:solidFill>
+      <p:sp>
+        <p:nvSpPr>
+          <p:cNvPr id="15" name="Rectangle 14"/>
+          <p:cNvSpPr/>
+          <p:nvPr/>
+        </p:nvSpPr>
+        <p:spPr>
+          <a:xfrm>
+            <a:off x="5696458" y="1847088"/>
+            <a:ext cx="12700" cy="54864"/>
+          </a:xfrm>
+          <a:prstGeom prst="rect">
+            <a:avLst/>
+          </a:prstGeom>
+          <a:solidFill>
+            <a:srgbClr val="D9E0EA"/>
+          </a:solidFill>
+          <a:ln>
+            <a:noFill/>
           </a:ln>
+          <a:effectLst/>
         </p:spPr>
         <p:style>
-          <a:lnRef idx="2">
+          <a:lnRef idx="1">
             <a:schemeClr val="accent1"/>
           </a:lnRef>
-          <a:fillRef idx="0">
+          <a:fillRef idx="3">
             <a:schemeClr val="accent1"/>
           </a:fillRef>
-          <a:effectRef idx="1">
+          <a:effectRef idx="2">
             <a:schemeClr val="accent1"/>
           </a:effectRef>
           <a:fontRef idx="minor">
-            <a:schemeClr val="tx1"/>
+            <a:schemeClr val="lt1"/>
           </a:fontRef>
         </p:style>
-      </p:cxnSp>
-      <p:cxnSp>
-        <p:nvCxnSpPr>
-          <p:cNvPr id="16" name="Connector 15"/>
-          <p:cNvCxnSpPr/>
-          <p:nvPr/>
-        </p:nvCxnSpPr>
-        <p:spPr>
-          <a:xfrm>
-            <a:off x="6689344" y="1847088"/>
-            <a:ext cx="0" cy="54864"/>
-          </a:xfrm>
-          <a:prstGeom prst="line">
-            <a:avLst/>
-          </a:prstGeom>
-          <a:ln w="12700">
-            <a:solidFill>
-              <a:srgbClr val="D9E0EA"/>
-            </a:solidFill>
+        <p:txBody>
+          <a:bodyPr rtlCol="0" anchor="ctr"/>
+          <a:lstStyle/>
+          <a:p>
+            <a:pPr algn="ctr"/>
+          </a:p>
+        </p:txBody>
+      </p:sp>
+      <p:sp>
+        <p:nvSpPr>
+          <p:cNvPr id="16" name="Rectangle 15"/>
+          <p:cNvSpPr/>
+          <p:nvPr/>
+        </p:nvSpPr>
+        <p:spPr>
+          <a:xfrm>
+            <a:off x="6682994" y="1847088"/>
+            <a:ext cx="12700" cy="54864"/>
+          </a:xfrm>
+          <a:prstGeom prst="rect">
+            <a:avLst/>
+          </a:prstGeom>
+          <a:solidFill>
+            <a:srgbClr val="D9E0EA"/>
+          </a:solidFill>
+          <a:ln>
+            <a:noFill/>
           </a:ln>
+          <a:effectLst/>
         </p:spPr>
         <p:style>
-          <a:lnRef idx="2">
+          <a:lnRef idx="1">
             <a:schemeClr val="accent1"/>
           </a:lnRef>
-          <a:fillRef idx="0">
+          <a:fillRef idx="3">
             <a:schemeClr val="accent1"/>
           </a:fillRef>
-          <a:effectRef idx="1">
+          <a:effectRef idx="2">
             <a:schemeClr val="accent1"/>
           </a:effectRef>
           <a:fontRef idx="minor">
-            <a:schemeClr val="tx1"/>
+            <a:schemeClr val="lt1"/>
           </a:fontRef>
         </p:style>
-      </p:cxnSp>
+        <p:txBody>
+          <a:bodyPr rtlCol="0" anchor="ctr"/>
+          <a:lstStyle/>
+          <a:p>
+            <a:pPr algn="ctr"/>
+          </a:p>
+        </p:txBody>
+      </p:sp>
       <p:sp>
         <p:nvSpPr>
           <p:cNvPr id="17" name="TextBox 16"/>
@@ -26953,76 +27196,94 @@
           </a:p>
         </p:txBody>
       </p:sp>
-      <p:cxnSp>
-        <p:nvCxnSpPr>
-          <p:cNvPr id="18" name="Connector 17"/>
-          <p:cNvCxnSpPr/>
-          <p:nvPr/>
-        </p:nvCxnSpPr>
-        <p:spPr>
-          <a:xfrm>
-            <a:off x="7675880" y="1847088"/>
-            <a:ext cx="0" cy="54864"/>
-          </a:xfrm>
-          <a:prstGeom prst="line">
-            <a:avLst/>
-          </a:prstGeom>
-          <a:ln w="12700">
-            <a:solidFill>
-              <a:srgbClr val="D9E0EA"/>
-            </a:solidFill>
+      <p:sp>
+        <p:nvSpPr>
+          <p:cNvPr id="18" name="Rectangle 17"/>
+          <p:cNvSpPr/>
+          <p:nvPr/>
+        </p:nvSpPr>
+        <p:spPr>
+          <a:xfrm>
+            <a:off x="7669530" y="1847088"/>
+            <a:ext cx="12700" cy="54864"/>
+          </a:xfrm>
+          <a:prstGeom prst="rect">
+            <a:avLst/>
+          </a:prstGeom>
+          <a:solidFill>
+            <a:srgbClr val="D9E0EA"/>
+          </a:solidFill>
+          <a:ln>
+            <a:noFill/>
           </a:ln>
+          <a:effectLst/>
         </p:spPr>
         <p:style>
-          <a:lnRef idx="2">
+          <a:lnRef idx="1">
             <a:schemeClr val="accent1"/>
           </a:lnRef>
-          <a:fillRef idx="0">
+          <a:fillRef idx="3">
             <a:schemeClr val="accent1"/>
           </a:fillRef>
-          <a:effectRef idx="1">
+          <a:effectRef idx="2">
             <a:schemeClr val="accent1"/>
           </a:effectRef>
           <a:fontRef idx="minor">
-            <a:schemeClr val="tx1"/>
+            <a:schemeClr val="lt1"/>
           </a:fontRef>
         </p:style>
-      </p:cxnSp>
-      <p:cxnSp>
-        <p:nvCxnSpPr>
-          <p:cNvPr id="19" name="Connector 18"/>
-          <p:cNvCxnSpPr/>
-          <p:nvPr/>
-        </p:nvCxnSpPr>
-        <p:spPr>
-          <a:xfrm>
-            <a:off x="8662416" y="1847088"/>
-            <a:ext cx="0" cy="54864"/>
-          </a:xfrm>
-          <a:prstGeom prst="line">
-            <a:avLst/>
-          </a:prstGeom>
-          <a:ln w="12700">
-            <a:solidFill>
-              <a:srgbClr val="D9E0EA"/>
-            </a:solidFill>
+        <p:txBody>
+          <a:bodyPr rtlCol="0" anchor="ctr"/>
+          <a:lstStyle/>
+          <a:p>
+            <a:pPr algn="ctr"/>
+          </a:p>
+        </p:txBody>
+      </p:sp>
+      <p:sp>
+        <p:nvSpPr>
+          <p:cNvPr id="19" name="Rectangle 18"/>
+          <p:cNvSpPr/>
+          <p:nvPr/>
+        </p:nvSpPr>
+        <p:spPr>
+          <a:xfrm>
+            <a:off x="8656066" y="1847088"/>
+            <a:ext cx="12700" cy="54864"/>
+          </a:xfrm>
+          <a:prstGeom prst="rect">
+            <a:avLst/>
+          </a:prstGeom>
+          <a:solidFill>
+            <a:srgbClr val="D9E0EA"/>
+          </a:solidFill>
+          <a:ln>
+            <a:noFill/>
           </a:ln>
+          <a:effectLst/>
         </p:spPr>
         <p:style>
-          <a:lnRef idx="2">
+          <a:lnRef idx="1">
             <a:schemeClr val="accent1"/>
           </a:lnRef>
-          <a:fillRef idx="0">
+          <a:fillRef idx="3">
             <a:schemeClr val="accent1"/>
           </a:fillRef>
-          <a:effectRef idx="1">
+          <a:effectRef idx="2">
             <a:schemeClr val="accent1"/>
           </a:effectRef>
           <a:fontRef idx="minor">
-            <a:schemeClr val="tx1"/>
+            <a:schemeClr val="lt1"/>
           </a:fontRef>
         </p:style>
-      </p:cxnSp>
+        <p:txBody>
+          <a:bodyPr rtlCol="0" anchor="ctr"/>
+          <a:lstStyle/>
+          <a:p>
+            <a:pPr algn="ctr"/>
+          </a:p>
+        </p:txBody>
+      </p:sp>
       <p:sp>
         <p:nvSpPr>
           <p:cNvPr id="20" name="TextBox 19"/>
@@ -27059,76 +27320,94 @@
           </a:p>
         </p:txBody>
       </p:sp>
-      <p:cxnSp>
-        <p:nvCxnSpPr>
-          <p:cNvPr id="21" name="Connector 20"/>
-          <p:cNvCxnSpPr/>
-          <p:nvPr/>
-        </p:nvCxnSpPr>
-        <p:spPr>
-          <a:xfrm>
-            <a:off x="9648952" y="1847088"/>
-            <a:ext cx="0" cy="54864"/>
-          </a:xfrm>
-          <a:prstGeom prst="line">
-            <a:avLst/>
-          </a:prstGeom>
-          <a:ln w="12700">
-            <a:solidFill>
-              <a:srgbClr val="D9E0EA"/>
-            </a:solidFill>
+      <p:sp>
+        <p:nvSpPr>
+          <p:cNvPr id="21" name="Rectangle 20"/>
+          <p:cNvSpPr/>
+          <p:nvPr/>
+        </p:nvSpPr>
+        <p:spPr>
+          <a:xfrm>
+            <a:off x="9642602" y="1847088"/>
+            <a:ext cx="12700" cy="54864"/>
+          </a:xfrm>
+          <a:prstGeom prst="rect">
+            <a:avLst/>
+          </a:prstGeom>
+          <a:solidFill>
+            <a:srgbClr val="D9E0EA"/>
+          </a:solidFill>
+          <a:ln>
+            <a:noFill/>
           </a:ln>
+          <a:effectLst/>
         </p:spPr>
         <p:style>
-          <a:lnRef idx="2">
+          <a:lnRef idx="1">
             <a:schemeClr val="accent1"/>
           </a:lnRef>
-          <a:fillRef idx="0">
+          <a:fillRef idx="3">
             <a:schemeClr val="accent1"/>
           </a:fillRef>
-          <a:effectRef idx="1">
+          <a:effectRef idx="2">
             <a:schemeClr val="accent1"/>
           </a:effectRef>
           <a:fontRef idx="minor">
-            <a:schemeClr val="tx1"/>
+            <a:schemeClr val="lt1"/>
           </a:fontRef>
         </p:style>
-      </p:cxnSp>
-      <p:cxnSp>
-        <p:nvCxnSpPr>
-          <p:cNvPr id="22" name="Connector 21"/>
-          <p:cNvCxnSpPr/>
-          <p:nvPr/>
-        </p:nvCxnSpPr>
-        <p:spPr>
-          <a:xfrm>
-            <a:off x="10635488" y="1847088"/>
-            <a:ext cx="0" cy="54864"/>
-          </a:xfrm>
-          <a:prstGeom prst="line">
-            <a:avLst/>
-          </a:prstGeom>
-          <a:ln w="12700">
-            <a:solidFill>
-              <a:srgbClr val="D9E0EA"/>
-            </a:solidFill>
+        <p:txBody>
+          <a:bodyPr rtlCol="0" anchor="ctr"/>
+          <a:lstStyle/>
+          <a:p>
+            <a:pPr algn="ctr"/>
+          </a:p>
+        </p:txBody>
+      </p:sp>
+      <p:sp>
+        <p:nvSpPr>
+          <p:cNvPr id="22" name="Rectangle 21"/>
+          <p:cNvSpPr/>
+          <p:nvPr/>
+        </p:nvSpPr>
+        <p:spPr>
+          <a:xfrm>
+            <a:off x="10629138" y="1847088"/>
+            <a:ext cx="12700" cy="54864"/>
+          </a:xfrm>
+          <a:prstGeom prst="rect">
+            <a:avLst/>
+          </a:prstGeom>
+          <a:solidFill>
+            <a:srgbClr val="D9E0EA"/>
+          </a:solidFill>
+          <a:ln>
+            <a:noFill/>
           </a:ln>
+          <a:effectLst/>
         </p:spPr>
         <p:style>
-          <a:lnRef idx="2">
+          <a:lnRef idx="1">
             <a:schemeClr val="accent1"/>
           </a:lnRef>
-          <a:fillRef idx="0">
+          <a:fillRef idx="3">
             <a:schemeClr val="accent1"/>
           </a:fillRef>
-          <a:effectRef idx="1">
+          <a:effectRef idx="2">
             <a:schemeClr val="accent1"/>
           </a:effectRef>
           <a:fontRef idx="minor">
-            <a:schemeClr val="tx1"/>
+            <a:schemeClr val="lt1"/>
           </a:fontRef>
         </p:style>
-      </p:cxnSp>
+        <p:txBody>
+          <a:bodyPr rtlCol="0" anchor="ctr"/>
+          <a:lstStyle/>
+          <a:p>
+            <a:pPr algn="ctr"/>
+          </a:p>
+        </p:txBody>
+      </p:sp>
       <p:sp>
         <p:nvSpPr>
           <p:cNvPr id="23" name="TextBox 22"/>
@@ -27165,41 +27444,50 @@
           </a:p>
         </p:txBody>
       </p:sp>
-      <p:cxnSp>
-        <p:nvCxnSpPr>
-          <p:cNvPr id="24" name="Connector 23"/>
-          <p:cNvCxnSpPr/>
-          <p:nvPr/>
-        </p:nvCxnSpPr>
-        <p:spPr>
-          <a:xfrm>
-            <a:off x="11622024" y="1847088"/>
-            <a:ext cx="0" cy="54864"/>
-          </a:xfrm>
-          <a:prstGeom prst="line">
-            <a:avLst/>
-          </a:prstGeom>
-          <a:ln w="12700">
-            <a:solidFill>
-              <a:srgbClr val="D9E0EA"/>
-            </a:solidFill>
+      <p:sp>
+        <p:nvSpPr>
+          <p:cNvPr id="24" name="Rectangle 23"/>
+          <p:cNvSpPr/>
+          <p:nvPr/>
+        </p:nvSpPr>
+        <p:spPr>
+          <a:xfrm>
+            <a:off x="11615674" y="1847088"/>
+            <a:ext cx="12700" cy="54864"/>
+          </a:xfrm>
+          <a:prstGeom prst="rect">
+            <a:avLst/>
+          </a:prstGeom>
+          <a:solidFill>
+            <a:srgbClr val="D9E0EA"/>
+          </a:solidFill>
+          <a:ln>
+            <a:noFill/>
           </a:ln>
+          <a:effectLst/>
         </p:spPr>
         <p:style>
-          <a:lnRef idx="2">
+          <a:lnRef idx="1">
             <a:schemeClr val="accent1"/>
           </a:lnRef>
-          <a:fillRef idx="0">
+          <a:fillRef idx="3">
             <a:schemeClr val="accent1"/>
           </a:fillRef>
-          <a:effectRef idx="1">
+          <a:effectRef idx="2">
             <a:schemeClr val="accent1"/>
           </a:effectRef>
           <a:fontRef idx="minor">
-            <a:schemeClr val="tx1"/>
+            <a:schemeClr val="lt1"/>
           </a:fontRef>
         </p:style>
-      </p:cxnSp>
+        <p:txBody>
+          <a:bodyPr rtlCol="0" anchor="ctr"/>
+          <a:lstStyle/>
+          <a:p>
+            <a:pPr algn="ctr"/>
+          </a:p>
+        </p:txBody>
+      </p:sp>
       <p:sp>
         <p:nvSpPr>
           <p:cNvPr id="25" name="TextBox 24"/>
@@ -27672,41 +27960,50 @@
           </a:p>
         </p:txBody>
       </p:sp>
-      <p:cxnSp>
-        <p:nvCxnSpPr>
-          <p:cNvPr id="37" name="Connector 36"/>
-          <p:cNvCxnSpPr/>
-          <p:nvPr/>
-        </p:nvCxnSpPr>
-        <p:spPr>
-          <a:xfrm>
-            <a:off x="11622024" y="2139696"/>
-            <a:ext cx="0" cy="1389888"/>
-          </a:xfrm>
-          <a:prstGeom prst="line">
-            <a:avLst/>
-          </a:prstGeom>
-          <a:ln w="17780">
-            <a:solidFill>
-              <a:srgbClr val="D14B45"/>
-            </a:solidFill>
+      <p:sp>
+        <p:nvSpPr>
+          <p:cNvPr id="37" name="Rectangle 36"/>
+          <p:cNvSpPr/>
+          <p:nvPr/>
+        </p:nvSpPr>
+        <p:spPr>
+          <a:xfrm>
+            <a:off x="11613134" y="2139696"/>
+            <a:ext cx="17780" cy="1389888"/>
+          </a:xfrm>
+          <a:prstGeom prst="rect">
+            <a:avLst/>
+          </a:prstGeom>
+          <a:solidFill>
+            <a:srgbClr val="D14B45"/>
+          </a:solidFill>
+          <a:ln>
+            <a:noFill/>
           </a:ln>
+          <a:effectLst/>
         </p:spPr>
         <p:style>
-          <a:lnRef idx="2">
+          <a:lnRef idx="1">
             <a:schemeClr val="accent1"/>
           </a:lnRef>
-          <a:fillRef idx="0">
+          <a:fillRef idx="3">
             <a:schemeClr val="accent1"/>
           </a:fillRef>
-          <a:effectRef idx="1">
+          <a:effectRef idx="2">
             <a:schemeClr val="accent1"/>
           </a:effectRef>
           <a:fontRef idx="minor">
-            <a:schemeClr val="tx1"/>
+            <a:schemeClr val="lt1"/>
           </a:fontRef>
         </p:style>
-      </p:cxnSp>
+        <p:txBody>
+          <a:bodyPr rtlCol="0" anchor="ctr"/>
+          <a:lstStyle/>
+          <a:p>
+            <a:pPr algn="ctr"/>
+          </a:p>
+        </p:txBody>
+      </p:sp>
       <p:sp>
         <p:nvSpPr>
           <p:cNvPr id="38" name="TextBox 37"/>
@@ -28299,41 +28596,50 @@
           </a:p>
         </p:txBody>
       </p:sp>
-      <p:cxnSp>
-        <p:nvCxnSpPr>
-          <p:cNvPr id="53" name="Connector 52"/>
-          <p:cNvCxnSpPr/>
-          <p:nvPr/>
-        </p:nvCxnSpPr>
-        <p:spPr>
-          <a:xfrm>
-            <a:off x="7675880" y="3950208"/>
-            <a:ext cx="0" cy="1719072"/>
-          </a:xfrm>
-          <a:prstGeom prst="line">
-            <a:avLst/>
-          </a:prstGeom>
-          <a:ln w="17780">
-            <a:solidFill>
-              <a:srgbClr val="2E9E6B"/>
-            </a:solidFill>
+      <p:sp>
+        <p:nvSpPr>
+          <p:cNvPr id="53" name="Rectangle 52"/>
+          <p:cNvSpPr/>
+          <p:nvPr/>
+        </p:nvSpPr>
+        <p:spPr>
+          <a:xfrm>
+            <a:off x="7666990" y="3950208"/>
+            <a:ext cx="17780" cy="1719072"/>
+          </a:xfrm>
+          <a:prstGeom prst="rect">
+            <a:avLst/>
+          </a:prstGeom>
+          <a:solidFill>
+            <a:srgbClr val="2E9E6B"/>
+          </a:solidFill>
+          <a:ln>
+            <a:noFill/>
           </a:ln>
+          <a:effectLst/>
         </p:spPr>
         <p:style>
-          <a:lnRef idx="2">
+          <a:lnRef idx="1">
             <a:schemeClr val="accent1"/>
           </a:lnRef>
-          <a:fillRef idx="0">
+          <a:fillRef idx="3">
             <a:schemeClr val="accent1"/>
           </a:fillRef>
-          <a:effectRef idx="1">
+          <a:effectRef idx="2">
             <a:schemeClr val="accent1"/>
           </a:effectRef>
           <a:fontRef idx="minor">
-            <a:schemeClr val="tx1"/>
+            <a:schemeClr val="lt1"/>
           </a:fontRef>
         </p:style>
-      </p:cxnSp>
+        <p:txBody>
+          <a:bodyPr rtlCol="0" anchor="ctr"/>
+          <a:lstStyle/>
+          <a:p>
+            <a:pPr algn="ctr"/>
+          </a:p>
+        </p:txBody>
+      </p:sp>
       <p:sp>
         <p:nvSpPr>
           <p:cNvPr id="54" name="TextBox 53"/>
@@ -28372,43 +28678,7 @@
       </p:sp>
       <p:sp>
         <p:nvSpPr>
-          <p:cNvPr id="55" name="TextBox 54"/>
-          <p:cNvSpPr txBox="1"/>
-          <p:nvPr/>
-        </p:nvSpPr>
-        <p:spPr>
-          <a:xfrm>
-            <a:off x="566928" y="2231136"/>
-            <a:ext cx="2084831" cy="201168"/>
-          </a:xfrm>
-          <a:prstGeom prst="rect">
-            <a:avLst/>
-          </a:prstGeom>
-          <a:noFill/>
-        </p:spPr>
-        <p:txBody>
-          <a:bodyPr wrap="square" lIns="0" rIns="0" tIns="9144" bIns="9144" anchor="t">
-            <a:spAutoFit/>
-          </a:bodyPr>
-          <a:lstStyle/>
-          <a:p>
-            <a:pPr algn="l"/>
-            <a:r>
-              <a:rPr sz="800" b="0">
-                <a:solidFill>
-                  <a:srgbClr val="33425C"/>
-                </a:solidFill>
-                <a:latin typeface="Arial"/>
-                <a:ea typeface="微软雅黑"/>
-              </a:rPr>
-              <a:t/>
-            </a:r>
-          </a:p>
-        </p:txBody>
-      </p:sp>
-      <p:sp>
-        <p:nvSpPr>
-          <p:cNvPr id="56" name="Rounded Rectangle 55"/>
+          <p:cNvPr id="55" name="Rounded Rectangle 54"/>
           <p:cNvSpPr/>
           <p:nvPr/>
         </p:nvSpPr>
@@ -28456,7 +28726,7 @@
       </p:sp>
       <p:sp>
         <p:nvSpPr>
-          <p:cNvPr id="57" name="Rectangle 56"/>
+          <p:cNvPr id="56" name="Rectangle 55"/>
           <p:cNvSpPr/>
           <p:nvPr/>
         </p:nvSpPr>
@@ -28500,7 +28770,7 @@
       </p:sp>
       <p:sp>
         <p:nvSpPr>
-          <p:cNvPr id="58" name="TextBox 57"/>
+          <p:cNvPr id="57" name="TextBox 56"/>
           <p:cNvSpPr txBox="1"/>
           <p:nvPr/>
         </p:nvSpPr>
@@ -28536,7 +28806,7 @@
       </p:sp>
       <p:sp>
         <p:nvSpPr>
-          <p:cNvPr id="59" name="TextBox 58"/>
+          <p:cNvPr id="58" name="TextBox 57"/>
           <p:cNvSpPr txBox="1"/>
           <p:nvPr/>
         </p:nvSpPr>
@@ -28750,41 +29020,50 @@
           </a:p>
         </p:txBody>
       </p:sp>
-      <p:cxnSp>
-        <p:nvCxnSpPr>
-          <p:cNvPr id="6" name="Connector 5"/>
-          <p:cNvCxnSpPr/>
-          <p:nvPr/>
-        </p:nvCxnSpPr>
-        <p:spPr>
-          <a:xfrm>
-            <a:off x="566928" y="1591056"/>
-            <a:ext cx="11058113" cy="0"/>
-          </a:xfrm>
-          <a:prstGeom prst="line">
-            <a:avLst/>
-          </a:prstGeom>
-          <a:ln w="12700">
-            <a:solidFill>
-              <a:srgbClr val="D9E0EA"/>
-            </a:solidFill>
+      <p:sp>
+        <p:nvSpPr>
+          <p:cNvPr id="6" name="Rectangle 5"/>
+          <p:cNvSpPr/>
+          <p:nvPr/>
+        </p:nvSpPr>
+        <p:spPr>
+          <a:xfrm>
+            <a:off x="566928" y="1584706"/>
+            <a:ext cx="11058113" cy="12700"/>
+          </a:xfrm>
+          <a:prstGeom prst="rect">
+            <a:avLst/>
+          </a:prstGeom>
+          <a:solidFill>
+            <a:srgbClr val="D9E0EA"/>
+          </a:solidFill>
+          <a:ln>
+            <a:noFill/>
           </a:ln>
+          <a:effectLst/>
         </p:spPr>
         <p:style>
-          <a:lnRef idx="2">
+          <a:lnRef idx="1">
             <a:schemeClr val="accent1"/>
           </a:lnRef>
-          <a:fillRef idx="0">
+          <a:fillRef idx="3">
             <a:schemeClr val="accent1"/>
           </a:fillRef>
-          <a:effectRef idx="1">
+          <a:effectRef idx="2">
             <a:schemeClr val="accent1"/>
           </a:effectRef>
           <a:fontRef idx="minor">
-            <a:schemeClr val="tx1"/>
+            <a:schemeClr val="lt1"/>
           </a:fontRef>
         </p:style>
-      </p:cxnSp>
+        <p:txBody>
+          <a:bodyPr rtlCol="0" anchor="ctr"/>
+          <a:lstStyle/>
+          <a:p>
+            <a:pPr algn="ctr"/>
+          </a:p>
+        </p:txBody>
+      </p:sp>
       <p:sp>
         <p:nvSpPr>
           <p:cNvPr id="7" name="TextBox 6"/>
@@ -31720,41 +31999,50 @@
           </a:p>
         </p:txBody>
       </p:sp>
-      <p:cxnSp>
-        <p:nvCxnSpPr>
-          <p:cNvPr id="6" name="Connector 5"/>
-          <p:cNvCxnSpPr/>
-          <p:nvPr/>
-        </p:nvCxnSpPr>
-        <p:spPr>
-          <a:xfrm>
-            <a:off x="566928" y="1591056"/>
-            <a:ext cx="11058113" cy="0"/>
-          </a:xfrm>
-          <a:prstGeom prst="line">
-            <a:avLst/>
-          </a:prstGeom>
-          <a:ln w="12700">
-            <a:solidFill>
-              <a:srgbClr val="D9E0EA"/>
-            </a:solidFill>
+      <p:sp>
+        <p:nvSpPr>
+          <p:cNvPr id="6" name="Rectangle 5"/>
+          <p:cNvSpPr/>
+          <p:nvPr/>
+        </p:nvSpPr>
+        <p:spPr>
+          <a:xfrm>
+            <a:off x="566928" y="1584706"/>
+            <a:ext cx="11058113" cy="12700"/>
+          </a:xfrm>
+          <a:prstGeom prst="rect">
+            <a:avLst/>
+          </a:prstGeom>
+          <a:solidFill>
+            <a:srgbClr val="D9E0EA"/>
+          </a:solidFill>
+          <a:ln>
+            <a:noFill/>
           </a:ln>
+          <a:effectLst/>
         </p:spPr>
         <p:style>
-          <a:lnRef idx="2">
+          <a:lnRef idx="1">
             <a:schemeClr val="accent1"/>
           </a:lnRef>
-          <a:fillRef idx="0">
+          <a:fillRef idx="3">
             <a:schemeClr val="accent1"/>
           </a:fillRef>
-          <a:effectRef idx="1">
+          <a:effectRef idx="2">
             <a:schemeClr val="accent1"/>
           </a:effectRef>
           <a:fontRef idx="minor">
-            <a:schemeClr val="tx1"/>
+            <a:schemeClr val="lt1"/>
           </a:fontRef>
         </p:style>
-      </p:cxnSp>
+        <p:txBody>
+          <a:bodyPr rtlCol="0" anchor="ctr"/>
+          <a:lstStyle/>
+          <a:p>
+            <a:pPr algn="ctr"/>
+          </a:p>
+        </p:txBody>
+      </p:sp>
       <p:sp>
         <p:nvSpPr>
           <p:cNvPr id="7" name="TextBox 6"/>
@@ -33146,41 +33434,50 @@
           </a:p>
         </p:txBody>
       </p:sp>
-      <p:cxnSp>
-        <p:nvCxnSpPr>
-          <p:cNvPr id="6" name="Connector 5"/>
-          <p:cNvCxnSpPr/>
-          <p:nvPr/>
-        </p:nvCxnSpPr>
-        <p:spPr>
-          <a:xfrm>
-            <a:off x="566928" y="1591056"/>
-            <a:ext cx="11058113" cy="0"/>
-          </a:xfrm>
-          <a:prstGeom prst="line">
-            <a:avLst/>
-          </a:prstGeom>
-          <a:ln w="12700">
-            <a:solidFill>
-              <a:srgbClr val="D9E0EA"/>
-            </a:solidFill>
+      <p:sp>
+        <p:nvSpPr>
+          <p:cNvPr id="6" name="Rectangle 5"/>
+          <p:cNvSpPr/>
+          <p:nvPr/>
+        </p:nvSpPr>
+        <p:spPr>
+          <a:xfrm>
+            <a:off x="566928" y="1584706"/>
+            <a:ext cx="11058113" cy="12700"/>
+          </a:xfrm>
+          <a:prstGeom prst="rect">
+            <a:avLst/>
+          </a:prstGeom>
+          <a:solidFill>
+            <a:srgbClr val="D9E0EA"/>
+          </a:solidFill>
+          <a:ln>
+            <a:noFill/>
           </a:ln>
+          <a:effectLst/>
         </p:spPr>
         <p:style>
-          <a:lnRef idx="2">
+          <a:lnRef idx="1">
             <a:schemeClr val="accent1"/>
           </a:lnRef>
-          <a:fillRef idx="0">
+          <a:fillRef idx="3">
             <a:schemeClr val="accent1"/>
           </a:fillRef>
-          <a:effectRef idx="1">
+          <a:effectRef idx="2">
             <a:schemeClr val="accent1"/>
           </a:effectRef>
           <a:fontRef idx="minor">
-            <a:schemeClr val="tx1"/>
+            <a:schemeClr val="lt1"/>
           </a:fontRef>
         </p:style>
-      </p:cxnSp>
+        <p:txBody>
+          <a:bodyPr rtlCol="0" anchor="ctr"/>
+          <a:lstStyle/>
+          <a:p>
+            <a:pPr algn="ctr"/>
+          </a:p>
+        </p:txBody>
+      </p:sp>
       <p:sp>
         <p:nvSpPr>
           <p:cNvPr id="7" name="TextBox 6"/>
@@ -34685,41 +34982,50 @@
           </a:p>
         </p:txBody>
       </p:sp>
-      <p:cxnSp>
-        <p:nvCxnSpPr>
-          <p:cNvPr id="6" name="Connector 5"/>
-          <p:cNvCxnSpPr/>
-          <p:nvPr/>
-        </p:nvCxnSpPr>
-        <p:spPr>
-          <a:xfrm>
-            <a:off x="566928" y="1591056"/>
-            <a:ext cx="11058113" cy="0"/>
-          </a:xfrm>
-          <a:prstGeom prst="line">
-            <a:avLst/>
-          </a:prstGeom>
-          <a:ln w="12700">
-            <a:solidFill>
-              <a:srgbClr val="D9E0EA"/>
-            </a:solidFill>
+      <p:sp>
+        <p:nvSpPr>
+          <p:cNvPr id="6" name="Rectangle 5"/>
+          <p:cNvSpPr/>
+          <p:nvPr/>
+        </p:nvSpPr>
+        <p:spPr>
+          <a:xfrm>
+            <a:off x="566928" y="1584706"/>
+            <a:ext cx="11058113" cy="12700"/>
+          </a:xfrm>
+          <a:prstGeom prst="rect">
+            <a:avLst/>
+          </a:prstGeom>
+          <a:solidFill>
+            <a:srgbClr val="D9E0EA"/>
+          </a:solidFill>
+          <a:ln>
+            <a:noFill/>
           </a:ln>
+          <a:effectLst/>
         </p:spPr>
         <p:style>
-          <a:lnRef idx="2">
+          <a:lnRef idx="1">
             <a:schemeClr val="accent1"/>
           </a:lnRef>
-          <a:fillRef idx="0">
+          <a:fillRef idx="3">
             <a:schemeClr val="accent1"/>
           </a:fillRef>
-          <a:effectRef idx="1">
+          <a:effectRef idx="2">
             <a:schemeClr val="accent1"/>
           </a:effectRef>
           <a:fontRef idx="minor">
-            <a:schemeClr val="tx1"/>
+            <a:schemeClr val="lt1"/>
           </a:fontRef>
         </p:style>
-      </p:cxnSp>
+        <p:txBody>
+          <a:bodyPr rtlCol="0" anchor="ctr"/>
+          <a:lstStyle/>
+          <a:p>
+            <a:pPr algn="ctr"/>
+          </a:p>
+        </p:txBody>
+      </p:sp>
       <p:sp>
         <p:nvSpPr>
           <p:cNvPr id="7" name="TextBox 6"/>
@@ -37600,41 +37906,50 @@
           </a:p>
         </p:txBody>
       </p:sp>
-      <p:cxnSp>
-        <p:nvCxnSpPr>
-          <p:cNvPr id="6" name="Connector 5"/>
-          <p:cNvCxnSpPr/>
-          <p:nvPr/>
-        </p:nvCxnSpPr>
-        <p:spPr>
-          <a:xfrm>
-            <a:off x="566928" y="1591056"/>
-            <a:ext cx="11058113" cy="0"/>
-          </a:xfrm>
-          <a:prstGeom prst="line">
-            <a:avLst/>
-          </a:prstGeom>
-          <a:ln w="12700">
-            <a:solidFill>
-              <a:srgbClr val="D9E0EA"/>
-            </a:solidFill>
+      <p:sp>
+        <p:nvSpPr>
+          <p:cNvPr id="6" name="Rectangle 5"/>
+          <p:cNvSpPr/>
+          <p:nvPr/>
+        </p:nvSpPr>
+        <p:spPr>
+          <a:xfrm>
+            <a:off x="566928" y="1584706"/>
+            <a:ext cx="11058113" cy="12700"/>
+          </a:xfrm>
+          <a:prstGeom prst="rect">
+            <a:avLst/>
+          </a:prstGeom>
+          <a:solidFill>
+            <a:srgbClr val="D9E0EA"/>
+          </a:solidFill>
+          <a:ln>
+            <a:noFill/>
           </a:ln>
+          <a:effectLst/>
         </p:spPr>
         <p:style>
-          <a:lnRef idx="2">
+          <a:lnRef idx="1">
             <a:schemeClr val="accent1"/>
           </a:lnRef>
-          <a:fillRef idx="0">
+          <a:fillRef idx="3">
             <a:schemeClr val="accent1"/>
           </a:fillRef>
-          <a:effectRef idx="1">
+          <a:effectRef idx="2">
             <a:schemeClr val="accent1"/>
           </a:effectRef>
           <a:fontRef idx="minor">
-            <a:schemeClr val="tx1"/>
+            <a:schemeClr val="lt1"/>
           </a:fontRef>
         </p:style>
-      </p:cxnSp>
+        <p:txBody>
+          <a:bodyPr rtlCol="0" anchor="ctr"/>
+          <a:lstStyle/>
+          <a:p>
+            <a:pPr algn="ctr"/>
+          </a:p>
+        </p:txBody>
+      </p:sp>
       <p:sp>
         <p:nvSpPr>
           <p:cNvPr id="7" name="TextBox 6"/>
